--- a/Проект_Эхо_презентация.pptx
+++ b/Проект_Эхо_презентация.pptx
@@ -2814,7 +2814,7 @@
                 <a:ea typeface="Calibri" pitchFamily="34" charset="-122"/>
                 <a:cs typeface="Calibri" pitchFamily="34" charset="-120"/>
               </a:rPr>
-              <a:t>ЧТО СДЕЛАНО И ЧТО ДАЛЬШЕ</a:t>
+              <a:t>ЧТО СДЕЛАНО И ЧТО ДАЛЬШЕ · ПРОЕКТ В РАЗРАБОТКЕ</a:t>
             </a:r>
             <a:endParaRPr lang="en-US" sz="1100" dirty="0"/>
           </a:p>
@@ -2956,7 +2956,7 @@
                 <a:ea typeface="Calibri" pitchFamily="34" charset="-122"/>
                 <a:cs typeface="Calibri" pitchFamily="34" charset="-120"/>
               </a:rPr>
-              <a:t>Шесть разделов, два квеста, шесть тестов</a:t>
+              <a:t>Шесть разделов, пять квестов, шесть тестов</a:t>
             </a:r>
             <a:endParaRPr lang="en-US" sz="1350" dirty="0"/>
           </a:p>
@@ -3148,7 +3148,7 @@
                 <a:ea typeface="Calibri" pitchFamily="34" charset="-122"/>
                 <a:cs typeface="Calibri" pitchFamily="34" charset="-120"/>
               </a:rPr>
-              <a:t>Двадцать медалей для обеих ролей</a:t>
+              <a:t>Двадцать пять медалей для обеих ролей</a:t>
             </a:r>
             <a:endParaRPr lang="en-US" sz="1350" dirty="0"/>
           </a:p>
@@ -5285,7 +5285,7 @@
                 <a:ea typeface="Calibri" pitchFamily="34" charset="-122"/>
                 <a:cs typeface="Calibri" pitchFamily="34" charset="-120"/>
               </a:rPr>
-              <a:t>квест в переписке и три теста про себя</a:t>
+              <a:t>четыре квеста в переписке и три теста про себя</a:t>
             </a:r>
             <a:endParaRPr lang="en-US" sz="1200" dirty="0"/>
           </a:p>
@@ -6724,7 +6724,7 @@
                 <a:ea typeface="Calibri" pitchFamily="34" charset="-122"/>
                 <a:cs typeface="Calibri" pitchFamily="34" charset="-120"/>
               </a:rPr>
-              <a:t>Истории лежат в обычных файлах, психолог добавляет новые сам.</a:t>
+              <a:t>Квестов уже пять, включая новый — «Свои» про вовлечение в закрытую группу.</a:t>
             </a:r>
             <a:endParaRPr lang="en-US" sz="1300" dirty="0"/>
           </a:p>
